--- a/img/logo/LogoMaker.pptx
+++ b/img/logo/LogoMaker.pptx
@@ -6850,10 +6850,10 @@
       </p:grpSp>
       <p:grpSp>
         <p:nvGrpSpPr>
-          <p:cNvPr id="45" name="Group 44">
+          <p:cNvPr id="2" name="Group 1">
             <a:extLst>
               <a:ext uri="{FF2B5EF4-FFF2-40B4-BE49-F238E27FC236}">
-                <a16:creationId xmlns:a16="http://schemas.microsoft.com/office/drawing/2014/main" id="{EA44B08E-56CE-49C7-A78F-F750D7D2DD6F}"/>
+                <a16:creationId xmlns:a16="http://schemas.microsoft.com/office/drawing/2014/main" id="{970447DB-164E-4E71-A764-5AF1B14FE87D}"/>
               </a:ext>
             </a:extLst>
           </p:cNvPr>
@@ -6868,260 +6868,239 @@
             <a:chExt cx="2490687" cy="1475118"/>
           </a:xfrm>
         </p:grpSpPr>
-        <p:grpSp>
-          <p:nvGrpSpPr>
-            <p:cNvPr id="44" name="Group 43">
+        <p:sp>
+          <p:nvSpPr>
+            <p:cNvPr id="101" name="Freeform: Shape 100" descr="Heart with solid fill">
               <a:extLst>
                 <a:ext uri="{FF2B5EF4-FFF2-40B4-BE49-F238E27FC236}">
-                  <a16:creationId xmlns:a16="http://schemas.microsoft.com/office/drawing/2014/main" id="{4E69F509-1BE9-427B-BD09-4499887D2DC5}"/>
+                  <a16:creationId xmlns:a16="http://schemas.microsoft.com/office/drawing/2014/main" id="{586B665E-F7A7-4071-8163-8FCF5F8B2754}"/>
                 </a:ext>
               </a:extLst>
             </p:cNvPr>
-            <p:cNvGrpSpPr/>
+            <p:cNvSpPr/>
             <p:nvPr/>
-          </p:nvGrpSpPr>
-          <p:grpSpPr>
+          </p:nvSpPr>
+          <p:spPr>
+            <a:xfrm rot="19643804">
+              <a:off x="6348513" y="3426838"/>
+              <a:ext cx="1604852" cy="1475118"/>
+            </a:xfrm>
+            <a:custGeom>
+              <a:avLst/>
+              <a:gdLst>
+                <a:gd name="connsiteX0" fmla="*/ 1374525 w 1604852"/>
+                <a:gd name="connsiteY0" fmla="*/ 44913 h 1475118"/>
+                <a:gd name="connsiteX1" fmla="*/ 1604852 w 1604852"/>
+                <a:gd name="connsiteY1" fmla="*/ 408950 h 1475118"/>
+                <a:gd name="connsiteX2" fmla="*/ 1530800 w 1604852"/>
+                <a:gd name="connsiteY2" fmla="*/ 693675 h 1475118"/>
+                <a:gd name="connsiteX3" fmla="*/ 1512781 w 1604852"/>
+                <a:gd name="connsiteY3" fmla="*/ 727178 h 1475118"/>
+                <a:gd name="connsiteX4" fmla="*/ 1529522 w 1604852"/>
+                <a:gd name="connsiteY4" fmla="*/ 665184 h 1475118"/>
+                <a:gd name="connsiteX5" fmla="*/ 1537403 w 1604852"/>
+                <a:gd name="connsiteY5" fmla="*/ 584172 h 1475118"/>
+                <a:gd name="connsiteX6" fmla="*/ 835708 w 1604852"/>
+                <a:gd name="connsiteY6" fmla="*/ 502927 h 1475118"/>
+                <a:gd name="connsiteX7" fmla="*/ 134013 w 1604852"/>
+                <a:gd name="connsiteY7" fmla="*/ 584172 h 1475118"/>
+                <a:gd name="connsiteX8" fmla="*/ 726069 w 1604852"/>
+                <a:gd name="connsiteY8" fmla="*/ 1449622 h 1475118"/>
+                <a:gd name="connsiteX9" fmla="*/ 756478 w 1604852"/>
+                <a:gd name="connsiteY9" fmla="*/ 1475118 h 1475118"/>
+                <a:gd name="connsiteX10" fmla="*/ 728375 w 1604852"/>
+                <a:gd name="connsiteY10" fmla="*/ 1452131 h 1475118"/>
+                <a:gd name="connsiteX11" fmla="*/ 0 w 1604852"/>
+                <a:gd name="connsiteY11" fmla="*/ 408950 h 1475118"/>
+                <a:gd name="connsiteX12" fmla="*/ 802426 w 1604852"/>
+                <a:gd name="connsiteY12" fmla="*/ 315101 h 1475118"/>
+                <a:gd name="connsiteX13" fmla="*/ 1374525 w 1604852"/>
+                <a:gd name="connsiteY13" fmla="*/ 44913 h 1475118"/>
+              </a:gdLst>
+              <a:ahLst/>
+              <a:cxnLst>
+                <a:cxn ang="0">
+                  <a:pos x="connsiteX0" y="connsiteY0"/>
+                </a:cxn>
+                <a:cxn ang="0">
+                  <a:pos x="connsiteX1" y="connsiteY1"/>
+                </a:cxn>
+                <a:cxn ang="0">
+                  <a:pos x="connsiteX2" y="connsiteY2"/>
+                </a:cxn>
+                <a:cxn ang="0">
+                  <a:pos x="connsiteX3" y="connsiteY3"/>
+                </a:cxn>
+                <a:cxn ang="0">
+                  <a:pos x="connsiteX4" y="connsiteY4"/>
+                </a:cxn>
+                <a:cxn ang="0">
+                  <a:pos x="connsiteX5" y="connsiteY5"/>
+                </a:cxn>
+                <a:cxn ang="0">
+                  <a:pos x="connsiteX6" y="connsiteY6"/>
+                </a:cxn>
+                <a:cxn ang="0">
+                  <a:pos x="connsiteX7" y="connsiteY7"/>
+                </a:cxn>
+                <a:cxn ang="0">
+                  <a:pos x="connsiteX8" y="connsiteY8"/>
+                </a:cxn>
+                <a:cxn ang="0">
+                  <a:pos x="connsiteX9" y="connsiteY9"/>
+                </a:cxn>
+                <a:cxn ang="0">
+                  <a:pos x="connsiteX10" y="connsiteY10"/>
+                </a:cxn>
+                <a:cxn ang="0">
+                  <a:pos x="connsiteX11" y="connsiteY11"/>
+                </a:cxn>
+                <a:cxn ang="0">
+                  <a:pos x="connsiteX12" y="connsiteY12"/>
+                </a:cxn>
+                <a:cxn ang="0">
+                  <a:pos x="connsiteX13" y="connsiteY13"/>
+                </a:cxn>
+              </a:cxnLst>
+              <a:rect l="l" t="t" r="r" b="b"/>
+              <a:pathLst>
+                <a:path w="1604852" h="1475118">
+                  <a:moveTo>
+                    <a:pt x="1374525" y="44913"/>
+                  </a:moveTo>
+                  <a:cubicBezTo>
+                    <a:pt x="1508181" y="117046"/>
+                    <a:pt x="1604852" y="265243"/>
+                    <a:pt x="1604852" y="408950"/>
+                  </a:cubicBezTo>
+                  <a:cubicBezTo>
+                    <a:pt x="1604852" y="501332"/>
+                    <a:pt x="1576642" y="597839"/>
+                    <a:pt x="1530800" y="693675"/>
+                  </a:cubicBezTo>
+                  <a:lnTo>
+                    <a:pt x="1512781" y="727178"/>
+                  </a:lnTo>
+                  <a:lnTo>
+                    <a:pt x="1529522" y="665184"/>
+                  </a:lnTo>
+                  <a:cubicBezTo>
+                    <a:pt x="1534662" y="637886"/>
+                    <a:pt x="1537403" y="610831"/>
+                    <a:pt x="1537403" y="584172"/>
+                  </a:cubicBezTo>
+                  <a:cubicBezTo>
+                    <a:pt x="1537403" y="299814"/>
+                    <a:pt x="1095748" y="-4855"/>
+                    <a:pt x="835708" y="502927"/>
+                  </a:cubicBezTo>
+                  <a:cubicBezTo>
+                    <a:pt x="575669" y="-4855"/>
+                    <a:pt x="134013" y="299814"/>
+                    <a:pt x="134013" y="584172"/>
+                  </a:cubicBezTo>
+                  <a:cubicBezTo>
+                    <a:pt x="134013" y="904074"/>
+                    <a:pt x="528717" y="1281102"/>
+                    <a:pt x="726069" y="1449622"/>
+                  </a:cubicBezTo>
+                  <a:lnTo>
+                    <a:pt x="756478" y="1475118"/>
+                  </a:lnTo>
+                  <a:lnTo>
+                    <a:pt x="728375" y="1452131"/>
+                  </a:lnTo>
+                  <a:cubicBezTo>
+                    <a:pt x="529727" y="1287041"/>
+                    <a:pt x="0" y="809273"/>
+                    <a:pt x="0" y="408950"/>
+                  </a:cubicBezTo>
+                  <a:cubicBezTo>
+                    <a:pt x="0" y="80478"/>
+                    <a:pt x="505057" y="-271455"/>
+                    <a:pt x="802426" y="315101"/>
+                  </a:cubicBezTo>
+                  <a:cubicBezTo>
+                    <a:pt x="969697" y="-14837"/>
+                    <a:pt x="1202681" y="-47831"/>
+                    <a:pt x="1374525" y="44913"/>
+                  </a:cubicBezTo>
+                  <a:close/>
+                </a:path>
+              </a:pathLst>
+            </a:custGeom>
+            <a:solidFill>
+              <a:srgbClr val="B92025"/>
+            </a:solidFill>
+            <a:ln w="27583" cap="flat">
+              <a:noFill/>
+              <a:prstDash val="solid"/>
+              <a:miter/>
+            </a:ln>
+          </p:spPr>
+          <p:txBody>
+            <a:bodyPr rtlCol="0" anchor="ctr"/>
+            <a:lstStyle/>
+            <a:p>
+              <a:endParaRPr lang="id-ID"/>
+            </a:p>
+          </p:txBody>
+        </p:sp>
+        <p:sp>
+          <p:nvSpPr>
+            <p:cNvPr id="81" name="TextBox 80">
+              <a:extLst>
+                <a:ext uri="{FF2B5EF4-FFF2-40B4-BE49-F238E27FC236}">
+                  <a16:creationId xmlns:a16="http://schemas.microsoft.com/office/drawing/2014/main" id="{9425669D-D402-4356-A030-B30D4437155D}"/>
+                </a:ext>
+              </a:extLst>
+            </p:cNvPr>
+            <p:cNvSpPr txBox="1"/>
+            <p:nvPr/>
+          </p:nvSpPr>
+          <p:spPr>
             <a:xfrm>
-              <a:off x="6348513" y="3426838"/>
-              <a:ext cx="2490687" cy="1475118"/>
-              <a:chOff x="6348513" y="3426838"/>
-              <a:chExt cx="2490687" cy="1475118"/>
+              <a:off x="6470673" y="3883673"/>
+              <a:ext cx="2368527" cy="707886"/>
             </a:xfrm>
-          </p:grpSpPr>
-          <p:sp>
-            <p:nvSpPr>
-              <p:cNvPr id="101" name="Freeform: Shape 100" descr="Heart with solid fill">
-                <a:extLst>
-                  <a:ext uri="{FF2B5EF4-FFF2-40B4-BE49-F238E27FC236}">
-                    <a16:creationId xmlns:a16="http://schemas.microsoft.com/office/drawing/2014/main" id="{586B665E-F7A7-4071-8163-8FCF5F8B2754}"/>
-                  </a:ext>
-                </a:extLst>
-              </p:cNvPr>
-              <p:cNvSpPr/>
-              <p:nvPr/>
-            </p:nvSpPr>
-            <p:spPr>
-              <a:xfrm rot="19643804">
-                <a:off x="6348513" y="3426838"/>
-                <a:ext cx="1604852" cy="1475118"/>
-              </a:xfrm>
-              <a:custGeom>
-                <a:avLst/>
-                <a:gdLst>
-                  <a:gd name="connsiteX0" fmla="*/ 1374525 w 1604852"/>
-                  <a:gd name="connsiteY0" fmla="*/ 44913 h 1475118"/>
-                  <a:gd name="connsiteX1" fmla="*/ 1604852 w 1604852"/>
-                  <a:gd name="connsiteY1" fmla="*/ 408950 h 1475118"/>
-                  <a:gd name="connsiteX2" fmla="*/ 1530800 w 1604852"/>
-                  <a:gd name="connsiteY2" fmla="*/ 693675 h 1475118"/>
-                  <a:gd name="connsiteX3" fmla="*/ 1512781 w 1604852"/>
-                  <a:gd name="connsiteY3" fmla="*/ 727178 h 1475118"/>
-                  <a:gd name="connsiteX4" fmla="*/ 1529522 w 1604852"/>
-                  <a:gd name="connsiteY4" fmla="*/ 665184 h 1475118"/>
-                  <a:gd name="connsiteX5" fmla="*/ 1537403 w 1604852"/>
-                  <a:gd name="connsiteY5" fmla="*/ 584172 h 1475118"/>
-                  <a:gd name="connsiteX6" fmla="*/ 835708 w 1604852"/>
-                  <a:gd name="connsiteY6" fmla="*/ 502927 h 1475118"/>
-                  <a:gd name="connsiteX7" fmla="*/ 134013 w 1604852"/>
-                  <a:gd name="connsiteY7" fmla="*/ 584172 h 1475118"/>
-                  <a:gd name="connsiteX8" fmla="*/ 726069 w 1604852"/>
-                  <a:gd name="connsiteY8" fmla="*/ 1449622 h 1475118"/>
-                  <a:gd name="connsiteX9" fmla="*/ 756478 w 1604852"/>
-                  <a:gd name="connsiteY9" fmla="*/ 1475118 h 1475118"/>
-                  <a:gd name="connsiteX10" fmla="*/ 728375 w 1604852"/>
-                  <a:gd name="connsiteY10" fmla="*/ 1452131 h 1475118"/>
-                  <a:gd name="connsiteX11" fmla="*/ 0 w 1604852"/>
-                  <a:gd name="connsiteY11" fmla="*/ 408950 h 1475118"/>
-                  <a:gd name="connsiteX12" fmla="*/ 802426 w 1604852"/>
-                  <a:gd name="connsiteY12" fmla="*/ 315101 h 1475118"/>
-                  <a:gd name="connsiteX13" fmla="*/ 1374525 w 1604852"/>
-                  <a:gd name="connsiteY13" fmla="*/ 44913 h 1475118"/>
-                </a:gdLst>
-                <a:ahLst/>
-                <a:cxnLst>
-                  <a:cxn ang="0">
-                    <a:pos x="connsiteX0" y="connsiteY0"/>
-                  </a:cxn>
-                  <a:cxn ang="0">
-                    <a:pos x="connsiteX1" y="connsiteY1"/>
-                  </a:cxn>
-                  <a:cxn ang="0">
-                    <a:pos x="connsiteX2" y="connsiteY2"/>
-                  </a:cxn>
-                  <a:cxn ang="0">
-                    <a:pos x="connsiteX3" y="connsiteY3"/>
-                  </a:cxn>
-                  <a:cxn ang="0">
-                    <a:pos x="connsiteX4" y="connsiteY4"/>
-                  </a:cxn>
-                  <a:cxn ang="0">
-                    <a:pos x="connsiteX5" y="connsiteY5"/>
-                  </a:cxn>
-                  <a:cxn ang="0">
-                    <a:pos x="connsiteX6" y="connsiteY6"/>
-                  </a:cxn>
-                  <a:cxn ang="0">
-                    <a:pos x="connsiteX7" y="connsiteY7"/>
-                  </a:cxn>
-                  <a:cxn ang="0">
-                    <a:pos x="connsiteX8" y="connsiteY8"/>
-                  </a:cxn>
-                  <a:cxn ang="0">
-                    <a:pos x="connsiteX9" y="connsiteY9"/>
-                  </a:cxn>
-                  <a:cxn ang="0">
-                    <a:pos x="connsiteX10" y="connsiteY10"/>
-                  </a:cxn>
-                  <a:cxn ang="0">
-                    <a:pos x="connsiteX11" y="connsiteY11"/>
-                  </a:cxn>
-                  <a:cxn ang="0">
-                    <a:pos x="connsiteX12" y="connsiteY12"/>
-                  </a:cxn>
-                  <a:cxn ang="0">
-                    <a:pos x="connsiteX13" y="connsiteY13"/>
-                  </a:cxn>
-                </a:cxnLst>
-                <a:rect l="l" t="t" r="r" b="b"/>
-                <a:pathLst>
-                  <a:path w="1604852" h="1475118">
-                    <a:moveTo>
-                      <a:pt x="1374525" y="44913"/>
-                    </a:moveTo>
-                    <a:cubicBezTo>
-                      <a:pt x="1508181" y="117046"/>
-                      <a:pt x="1604852" y="265243"/>
-                      <a:pt x="1604852" y="408950"/>
-                    </a:cubicBezTo>
-                    <a:cubicBezTo>
-                      <a:pt x="1604852" y="501332"/>
-                      <a:pt x="1576642" y="597839"/>
-                      <a:pt x="1530800" y="693675"/>
-                    </a:cubicBezTo>
-                    <a:lnTo>
-                      <a:pt x="1512781" y="727178"/>
-                    </a:lnTo>
-                    <a:lnTo>
-                      <a:pt x="1529522" y="665184"/>
-                    </a:lnTo>
-                    <a:cubicBezTo>
-                      <a:pt x="1534662" y="637886"/>
-                      <a:pt x="1537403" y="610831"/>
-                      <a:pt x="1537403" y="584172"/>
-                    </a:cubicBezTo>
-                    <a:cubicBezTo>
-                      <a:pt x="1537403" y="299814"/>
-                      <a:pt x="1095748" y="-4855"/>
-                      <a:pt x="835708" y="502927"/>
-                    </a:cubicBezTo>
-                    <a:cubicBezTo>
-                      <a:pt x="575669" y="-4855"/>
-                      <a:pt x="134013" y="299814"/>
-                      <a:pt x="134013" y="584172"/>
-                    </a:cubicBezTo>
-                    <a:cubicBezTo>
-                      <a:pt x="134013" y="904074"/>
-                      <a:pt x="528717" y="1281102"/>
-                      <a:pt x="726069" y="1449622"/>
-                    </a:cubicBezTo>
-                    <a:lnTo>
-                      <a:pt x="756478" y="1475118"/>
-                    </a:lnTo>
-                    <a:lnTo>
-                      <a:pt x="728375" y="1452131"/>
-                    </a:lnTo>
-                    <a:cubicBezTo>
-                      <a:pt x="529727" y="1287041"/>
-                      <a:pt x="0" y="809273"/>
-                      <a:pt x="0" y="408950"/>
-                    </a:cubicBezTo>
-                    <a:cubicBezTo>
-                      <a:pt x="0" y="80478"/>
-                      <a:pt x="505057" y="-271455"/>
-                      <a:pt x="802426" y="315101"/>
-                    </a:cubicBezTo>
-                    <a:cubicBezTo>
-                      <a:pt x="969697" y="-14837"/>
-                      <a:pt x="1202681" y="-47831"/>
-                      <a:pt x="1374525" y="44913"/>
-                    </a:cubicBezTo>
-                    <a:close/>
-                  </a:path>
-                </a:pathLst>
-              </a:custGeom>
-              <a:solidFill>
-                <a:srgbClr val="B92025"/>
-              </a:solidFill>
-              <a:ln w="27583" cap="flat">
-                <a:noFill/>
-                <a:prstDash val="solid"/>
-                <a:miter/>
-              </a:ln>
-            </p:spPr>
-            <p:txBody>
-              <a:bodyPr rtlCol="0" anchor="ctr"/>
-              <a:lstStyle/>
-              <a:p>
-                <a:endParaRPr lang="id-ID"/>
-              </a:p>
-            </p:txBody>
-          </p:sp>
-          <p:sp>
-            <p:nvSpPr>
-              <p:cNvPr id="81" name="TextBox 80">
-                <a:extLst>
-                  <a:ext uri="{FF2B5EF4-FFF2-40B4-BE49-F238E27FC236}">
-                    <a16:creationId xmlns:a16="http://schemas.microsoft.com/office/drawing/2014/main" id="{9425669D-D402-4356-A030-B30D4437155D}"/>
-                  </a:ext>
-                </a:extLst>
-              </p:cNvPr>
-              <p:cNvSpPr txBox="1"/>
-              <p:nvPr/>
-            </p:nvSpPr>
-            <p:spPr>
-              <a:xfrm>
-                <a:off x="6470673" y="3883673"/>
-                <a:ext cx="2368527" cy="707886"/>
-              </a:xfrm>
-              <a:prstGeom prst="rect">
-                <a:avLst/>
-              </a:prstGeom>
-              <a:noFill/>
-            </p:spPr>
-            <p:txBody>
-              <a:bodyPr wrap="square" rtlCol="0">
-                <a:spAutoFit/>
-              </a:bodyPr>
-              <a:lstStyle/>
-              <a:p>
-                <a:r>
-                  <a:rPr lang="en-US" sz="4000" b="1" dirty="0" err="1">
-                    <a:solidFill>
-                      <a:srgbClr val="C00000"/>
-                    </a:solidFill>
-                    <a:latin typeface="Book Antiqua" panose="02040602050305030304" pitchFamily="18" charset="0"/>
-                  </a:rPr>
-                  <a:t>inta</a:t>
-                </a:r>
-                <a:r>
-                  <a:rPr lang="en-US" sz="4000" b="1" dirty="0" err="1">
-                    <a:solidFill>
-                      <a:srgbClr val="0C7D3E"/>
-                    </a:solidFill>
-                    <a:latin typeface="Book Antiqua" panose="02040602050305030304" pitchFamily="18" charset="0"/>
-                  </a:rPr>
-                  <a:t>TEPE</a:t>
-                </a:r>
-                <a:endParaRPr lang="en-US" sz="3200" b="1" dirty="0">
+            <a:prstGeom prst="rect">
+              <a:avLst/>
+            </a:prstGeom>
+            <a:noFill/>
+          </p:spPr>
+          <p:txBody>
+            <a:bodyPr wrap="square" rtlCol="0">
+              <a:spAutoFit/>
+            </a:bodyPr>
+            <a:lstStyle/>
+            <a:p>
+              <a:r>
+                <a:rPr lang="en-US" sz="4000" b="1" dirty="0" err="1">
+                  <a:solidFill>
+                    <a:srgbClr val="C00000"/>
+                  </a:solidFill>
+                  <a:latin typeface="Book Antiqua" panose="02040602050305030304" pitchFamily="18" charset="0"/>
+                </a:rPr>
+                <a:t>inta</a:t>
+              </a:r>
+              <a:r>
+                <a:rPr lang="en-US" sz="4000" b="1" dirty="0" err="1">
                   <a:solidFill>
                     <a:srgbClr val="0C7D3E"/>
                   </a:solidFill>
                   <a:latin typeface="Book Antiqua" panose="02040602050305030304" pitchFamily="18" charset="0"/>
-                </a:endParaRPr>
-              </a:p>
-            </p:txBody>
-          </p:sp>
-        </p:grpSp>
+                </a:rPr>
+                <a:t>TEPE</a:t>
+              </a:r>
+              <a:endParaRPr lang="en-US" sz="3200" b="1" dirty="0">
+                <a:solidFill>
+                  <a:srgbClr val="0C7D3E"/>
+                </a:solidFill>
+                <a:latin typeface="Book Antiqua" panose="02040602050305030304" pitchFamily="18" charset="0"/>
+              </a:endParaRPr>
+            </a:p>
+          </p:txBody>
+        </p:sp>
         <p:sp>
           <p:nvSpPr>
             <p:cNvPr id="99" name="TextBox 98">
@@ -7182,6 +7161,184 @@
           </p:txBody>
         </p:sp>
       </p:grpSp>
+      <p:sp>
+        <p:nvSpPr>
+          <p:cNvPr id="82" name="Freeform: Shape 81" descr="Heart with solid fill">
+            <a:extLst>
+              <a:ext uri="{FF2B5EF4-FFF2-40B4-BE49-F238E27FC236}">
+                <a16:creationId xmlns:a16="http://schemas.microsoft.com/office/drawing/2014/main" id="{0850700D-B314-45B0-B3D3-671096FCF43D}"/>
+              </a:ext>
+            </a:extLst>
+          </p:cNvPr>
+          <p:cNvSpPr/>
+          <p:nvPr/>
+        </p:nvSpPr>
+        <p:spPr>
+          <a:xfrm rot="19643804">
+            <a:off x="2415852" y="3651273"/>
+            <a:ext cx="1604852" cy="1475118"/>
+          </a:xfrm>
+          <a:custGeom>
+            <a:avLst/>
+            <a:gdLst>
+              <a:gd name="connsiteX0" fmla="*/ 1374525 w 1604852"/>
+              <a:gd name="connsiteY0" fmla="*/ 44913 h 1475118"/>
+              <a:gd name="connsiteX1" fmla="*/ 1604852 w 1604852"/>
+              <a:gd name="connsiteY1" fmla="*/ 408950 h 1475118"/>
+              <a:gd name="connsiteX2" fmla="*/ 1530800 w 1604852"/>
+              <a:gd name="connsiteY2" fmla="*/ 693675 h 1475118"/>
+              <a:gd name="connsiteX3" fmla="*/ 1512781 w 1604852"/>
+              <a:gd name="connsiteY3" fmla="*/ 727178 h 1475118"/>
+              <a:gd name="connsiteX4" fmla="*/ 1529522 w 1604852"/>
+              <a:gd name="connsiteY4" fmla="*/ 665184 h 1475118"/>
+              <a:gd name="connsiteX5" fmla="*/ 1537403 w 1604852"/>
+              <a:gd name="connsiteY5" fmla="*/ 584172 h 1475118"/>
+              <a:gd name="connsiteX6" fmla="*/ 835708 w 1604852"/>
+              <a:gd name="connsiteY6" fmla="*/ 502927 h 1475118"/>
+              <a:gd name="connsiteX7" fmla="*/ 134013 w 1604852"/>
+              <a:gd name="connsiteY7" fmla="*/ 584172 h 1475118"/>
+              <a:gd name="connsiteX8" fmla="*/ 726069 w 1604852"/>
+              <a:gd name="connsiteY8" fmla="*/ 1449622 h 1475118"/>
+              <a:gd name="connsiteX9" fmla="*/ 756478 w 1604852"/>
+              <a:gd name="connsiteY9" fmla="*/ 1475118 h 1475118"/>
+              <a:gd name="connsiteX10" fmla="*/ 728375 w 1604852"/>
+              <a:gd name="connsiteY10" fmla="*/ 1452131 h 1475118"/>
+              <a:gd name="connsiteX11" fmla="*/ 0 w 1604852"/>
+              <a:gd name="connsiteY11" fmla="*/ 408950 h 1475118"/>
+              <a:gd name="connsiteX12" fmla="*/ 802426 w 1604852"/>
+              <a:gd name="connsiteY12" fmla="*/ 315101 h 1475118"/>
+              <a:gd name="connsiteX13" fmla="*/ 1374525 w 1604852"/>
+              <a:gd name="connsiteY13" fmla="*/ 44913 h 1475118"/>
+            </a:gdLst>
+            <a:ahLst/>
+            <a:cxnLst>
+              <a:cxn ang="0">
+                <a:pos x="connsiteX0" y="connsiteY0"/>
+              </a:cxn>
+              <a:cxn ang="0">
+                <a:pos x="connsiteX1" y="connsiteY1"/>
+              </a:cxn>
+              <a:cxn ang="0">
+                <a:pos x="connsiteX2" y="connsiteY2"/>
+              </a:cxn>
+              <a:cxn ang="0">
+                <a:pos x="connsiteX3" y="connsiteY3"/>
+              </a:cxn>
+              <a:cxn ang="0">
+                <a:pos x="connsiteX4" y="connsiteY4"/>
+              </a:cxn>
+              <a:cxn ang="0">
+                <a:pos x="connsiteX5" y="connsiteY5"/>
+              </a:cxn>
+              <a:cxn ang="0">
+                <a:pos x="connsiteX6" y="connsiteY6"/>
+              </a:cxn>
+              <a:cxn ang="0">
+                <a:pos x="connsiteX7" y="connsiteY7"/>
+              </a:cxn>
+              <a:cxn ang="0">
+                <a:pos x="connsiteX8" y="connsiteY8"/>
+              </a:cxn>
+              <a:cxn ang="0">
+                <a:pos x="connsiteX9" y="connsiteY9"/>
+              </a:cxn>
+              <a:cxn ang="0">
+                <a:pos x="connsiteX10" y="connsiteY10"/>
+              </a:cxn>
+              <a:cxn ang="0">
+                <a:pos x="connsiteX11" y="connsiteY11"/>
+              </a:cxn>
+              <a:cxn ang="0">
+                <a:pos x="connsiteX12" y="connsiteY12"/>
+              </a:cxn>
+              <a:cxn ang="0">
+                <a:pos x="connsiteX13" y="connsiteY13"/>
+              </a:cxn>
+            </a:cxnLst>
+            <a:rect l="l" t="t" r="r" b="b"/>
+            <a:pathLst>
+              <a:path w="1604852" h="1475118">
+                <a:moveTo>
+                  <a:pt x="1374525" y="44913"/>
+                </a:moveTo>
+                <a:cubicBezTo>
+                  <a:pt x="1508181" y="117046"/>
+                  <a:pt x="1604852" y="265243"/>
+                  <a:pt x="1604852" y="408950"/>
+                </a:cubicBezTo>
+                <a:cubicBezTo>
+                  <a:pt x="1604852" y="501332"/>
+                  <a:pt x="1576642" y="597839"/>
+                  <a:pt x="1530800" y="693675"/>
+                </a:cubicBezTo>
+                <a:lnTo>
+                  <a:pt x="1512781" y="727178"/>
+                </a:lnTo>
+                <a:lnTo>
+                  <a:pt x="1529522" y="665184"/>
+                </a:lnTo>
+                <a:cubicBezTo>
+                  <a:pt x="1534662" y="637886"/>
+                  <a:pt x="1537403" y="610831"/>
+                  <a:pt x="1537403" y="584172"/>
+                </a:cubicBezTo>
+                <a:cubicBezTo>
+                  <a:pt x="1537403" y="299814"/>
+                  <a:pt x="1095748" y="-4855"/>
+                  <a:pt x="835708" y="502927"/>
+                </a:cubicBezTo>
+                <a:cubicBezTo>
+                  <a:pt x="575669" y="-4855"/>
+                  <a:pt x="134013" y="299814"/>
+                  <a:pt x="134013" y="584172"/>
+                </a:cubicBezTo>
+                <a:cubicBezTo>
+                  <a:pt x="134013" y="904074"/>
+                  <a:pt x="528717" y="1281102"/>
+                  <a:pt x="726069" y="1449622"/>
+                </a:cubicBezTo>
+                <a:lnTo>
+                  <a:pt x="756478" y="1475118"/>
+                </a:lnTo>
+                <a:lnTo>
+                  <a:pt x="728375" y="1452131"/>
+                </a:lnTo>
+                <a:cubicBezTo>
+                  <a:pt x="529727" y="1287041"/>
+                  <a:pt x="0" y="809273"/>
+                  <a:pt x="0" y="408950"/>
+                </a:cubicBezTo>
+                <a:cubicBezTo>
+                  <a:pt x="0" y="80478"/>
+                  <a:pt x="505057" y="-271455"/>
+                  <a:pt x="802426" y="315101"/>
+                </a:cubicBezTo>
+                <a:cubicBezTo>
+                  <a:pt x="969697" y="-14837"/>
+                  <a:pt x="1202681" y="-47831"/>
+                  <a:pt x="1374525" y="44913"/>
+                </a:cubicBezTo>
+                <a:close/>
+              </a:path>
+            </a:pathLst>
+          </a:custGeom>
+          <a:solidFill>
+            <a:srgbClr val="B92025"/>
+          </a:solidFill>
+          <a:ln w="27583" cap="flat">
+            <a:noFill/>
+            <a:prstDash val="solid"/>
+            <a:miter/>
+          </a:ln>
+        </p:spPr>
+        <p:txBody>
+          <a:bodyPr rtlCol="0" anchor="ctr"/>
+          <a:lstStyle/>
+          <a:p>
+            <a:endParaRPr lang="id-ID"/>
+          </a:p>
+        </p:txBody>
+      </p:sp>
     </p:spTree>
     <p:extLst>
       <p:ext uri="{BB962C8B-B14F-4D97-AF65-F5344CB8AC3E}">
